--- a/Quadro_Aulas_Report_2026-06-03.pptx
+++ b/Quadro_Aulas_Report_2026-06-03.pptx
@@ -1038,7 +1038,7 @@
                   <a:srgbClr val="8FA3C0"/>
                 </a:solidFill>
               </a:rPr>
-              <a:t>3 de Junho de 2026 as 09:14</a:t>
+              <a:t>3 de Junho de 2026 as 09:25</a:t>
             </a:r>
             <a:endParaRPr lang="en-US" sz="700" dirty="0"/>
           </a:p>

--- a/Quadro_Aulas_Report_2026-06-03.pptx
+++ b/Quadro_Aulas_Report_2026-06-03.pptx
@@ -1038,7 +1038,7 @@
                   <a:srgbClr val="8FA3C0"/>
                 </a:solidFill>
               </a:rPr>
-              <a:t>3 de Junho de 2026 as 09:25</a:t>
+              <a:t>3 de Junho de 2026 as 09:28</a:t>
             </a:r>
             <a:endParaRPr lang="en-US" sz="700" dirty="0"/>
           </a:p>

--- a/Quadro_Aulas_Report_2026-06-03.pptx
+++ b/Quadro_Aulas_Report_2026-06-03.pptx
@@ -1038,7 +1038,7 @@
                   <a:srgbClr val="8FA3C0"/>
                 </a:solidFill>
               </a:rPr>
-              <a:t>3 de Junho de 2026 as 09:28</a:t>
+              <a:t>3 de Junho de 2026 as 09:30</a:t>
             </a:r>
             <a:endParaRPr lang="en-US" sz="700" dirty="0"/>
           </a:p>

--- a/Quadro_Aulas_Report_2026-06-03.pptx
+++ b/Quadro_Aulas_Report_2026-06-03.pptx
@@ -1038,7 +1038,7 @@
                   <a:srgbClr val="8FA3C0"/>
                 </a:solidFill>
               </a:rPr>
-              <a:t>3 de Junho de 2026 as 09:30</a:t>
+              <a:t>3 de Junho de 2026 as 09:40</a:t>
             </a:r>
             <a:endParaRPr lang="en-US" sz="700" dirty="0"/>
           </a:p>

--- a/Quadro_Aulas_Report_2026-06-03.pptx
+++ b/Quadro_Aulas_Report_2026-06-03.pptx
@@ -1038,7 +1038,7 @@
                   <a:srgbClr val="8FA3C0"/>
                 </a:solidFill>
               </a:rPr>
-              <a:t>3 de Junho de 2026 as 09:40</a:t>
+              <a:t>3 de Junho de 2026 as 11:30</a:t>
             </a:r>
             <a:endParaRPr lang="en-US" sz="700" dirty="0"/>
           </a:p>

--- a/Quadro_Aulas_Report_2026-06-03.pptx
+++ b/Quadro_Aulas_Report_2026-06-03.pptx
@@ -1038,7 +1038,7 @@
                   <a:srgbClr val="8FA3C0"/>
                 </a:solidFill>
               </a:rPr>
-              <a:t>3 de Junho de 2026 as 11:30</a:t>
+              <a:t>3 de Junho de 2026 as 11:49</a:t>
             </a:r>
             <a:endParaRPr lang="en-US" sz="700" dirty="0"/>
           </a:p>

--- a/Quadro_Aulas_Report_2026-06-03.pptx
+++ b/Quadro_Aulas_Report_2026-06-03.pptx
@@ -1038,7 +1038,7 @@
                   <a:srgbClr val="8FA3C0"/>
                 </a:solidFill>
               </a:rPr>
-              <a:t>3 de Junho de 2026 as 11:49</a:t>
+              <a:t>3 de Junho de 2026 as 11:52</a:t>
             </a:r>
             <a:endParaRPr lang="en-US" sz="700" dirty="0"/>
           </a:p>

--- a/Quadro_Aulas_Report_2026-06-03.pptx
+++ b/Quadro_Aulas_Report_2026-06-03.pptx
@@ -1038,7 +1038,7 @@
                   <a:srgbClr val="8FA3C0"/>
                 </a:solidFill>
               </a:rPr>
-              <a:t>3 de Junho de 2026 as 11:52</a:t>
+              <a:t>3 de Junho de 2026 as 12:42</a:t>
             </a:r>
             <a:endParaRPr lang="en-US" sz="700" dirty="0"/>
           </a:p>

--- a/Quadro_Aulas_Report_2026-06-03.pptx
+++ b/Quadro_Aulas_Report_2026-06-03.pptx
@@ -1038,7 +1038,7 @@
                   <a:srgbClr val="8FA3C0"/>
                 </a:solidFill>
               </a:rPr>
-              <a:t>3 de Junho de 2026 as 12:42</a:t>
+              <a:t>3 de Junho de 2026 as 12:50</a:t>
             </a:r>
             <a:endParaRPr lang="en-US" sz="700" dirty="0"/>
           </a:p>

--- a/Quadro_Aulas_Report_2026-06-03.pptx
+++ b/Quadro_Aulas_Report_2026-06-03.pptx
@@ -1038,7 +1038,7 @@
                   <a:srgbClr val="8FA3C0"/>
                 </a:solidFill>
               </a:rPr>
-              <a:t>3 de Junho de 2026 as 12:50</a:t>
+              <a:t>3 de Junho de 2026 as 12:59</a:t>
             </a:r>
             <a:endParaRPr lang="en-US" sz="700" dirty="0"/>
           </a:p>

--- a/Quadro_Aulas_Report_2026-06-03.pptx
+++ b/Quadro_Aulas_Report_2026-06-03.pptx
@@ -1038,7 +1038,7 @@
                   <a:srgbClr val="8FA3C0"/>
                 </a:solidFill>
               </a:rPr>
-              <a:t>3 de Junho de 2026 as 12:59</a:t>
+              <a:t>3 de Junho de 2026 as 13:00</a:t>
             </a:r>
             <a:endParaRPr lang="en-US" sz="700" dirty="0"/>
           </a:p>

--- a/Quadro_Aulas_Report_2026-06-03.pptx
+++ b/Quadro_Aulas_Report_2026-06-03.pptx
@@ -1038,7 +1038,7 @@
                   <a:srgbClr val="8FA3C0"/>
                 </a:solidFill>
               </a:rPr>
-              <a:t>3 de Junho de 2026 as 13:00</a:t>
+              <a:t>3 de Junho de 2026 as 13:02</a:t>
             </a:r>
             <a:endParaRPr lang="en-US" sz="700" dirty="0"/>
           </a:p>

--- a/Quadro_Aulas_Report_2026-06-03.pptx
+++ b/Quadro_Aulas_Report_2026-06-03.pptx
@@ -1038,7 +1038,7 @@
                   <a:srgbClr val="8FA3C0"/>
                 </a:solidFill>
               </a:rPr>
-              <a:t>3 de Junho de 2026 as 13:02</a:t>
+              <a:t>3 de Junho de 2026 as 13:04</a:t>
             </a:r>
             <a:endParaRPr lang="en-US" sz="700" dirty="0"/>
           </a:p>

--- a/Quadro_Aulas_Report_2026-06-03.pptx
+++ b/Quadro_Aulas_Report_2026-06-03.pptx
@@ -1038,7 +1038,7 @@
                   <a:srgbClr val="8FA3C0"/>
                 </a:solidFill>
               </a:rPr>
-              <a:t>3 de Junho de 2026 as 13:04</a:t>
+              <a:t>3 de Junho de 2026 as 13:34</a:t>
             </a:r>
             <a:endParaRPr lang="en-US" sz="700" dirty="0"/>
           </a:p>
@@ -1135,7 +1135,7 @@
                   <a:srgbClr val="FFFFFF"/>
                 </a:solidFill>
               </a:rPr>
-              <a:t>347</a:t>
+              <a:t>348</a:t>
             </a:r>
             <a:endParaRPr lang="en-US" sz="2400" dirty="0"/>
           </a:p>
@@ -1207,7 +1207,7 @@
                   <a:srgbClr val="4ADE80"/>
                 </a:solidFill>
               </a:rPr>
-              <a:t>240</a:t>
+              <a:t>241</a:t>
             </a:r>
             <a:endParaRPr lang="en-US" sz="2400" dirty="0"/>
           </a:p>
@@ -1473,7 +1473,7 @@
                   <a:srgbClr val="8FA3C0"/>
                 </a:solidFill>
               </a:rPr>
-              <a:t>69% concluido  .  240 de 347 itens</a:t>
+              <a:t>69% concluido  .  241 de 348 itens</a:t>
             </a:r>
             <a:endParaRPr lang="en-US" sz="700" dirty="0"/>
           </a:p>
@@ -2227,7 +2227,7 @@
                   <a:srgbClr val="222222"/>
                 </a:solidFill>
               </a:rPr>
-              <a:t>8 Stories · 3 NFT · 98 itens</a:t>
+              <a:t>8 Stories · 3 NFT · 99 itens</a:t>
             </a:r>
             <a:endParaRPr lang="en-US" sz="750" dirty="0"/>
           </a:p>
@@ -2263,7 +2263,7 @@
                   <a:srgbClr val="222222"/>
                 </a:solidFill>
               </a:rPr>
-              <a:t>A Fazer: 16 . Em progresso: 4 . Finalizados: 78</a:t>
+              <a:t>A Fazer: 16 . Em progresso: 4 . Finalizados: 79</a:t>
             </a:r>
             <a:endParaRPr lang="en-US" sz="750" dirty="0"/>
           </a:p>
@@ -2299,7 +2299,7 @@
                   <a:srgbClr val="222222"/>
                 </a:solidFill>
               </a:rPr>
-              <a:t>Est: 397h . Real: 431.9h . Rem: 42.3h</a:t>
+              <a:t>Est: 401h . Real: 435.9h . Rem: 42.3h</a:t>
             </a:r>
             <a:endParaRPr lang="en-US" sz="750" dirty="0"/>
           </a:p>
@@ -2471,7 +2471,7 @@
                   <a:srgbClr val="888888"/>
                 </a:solidFill>
               </a:rPr>
-              <a:t>Subs: 80% · 78 de 98</a:t>
+              <a:t>Subs: 80% · 79 de 99</a:t>
             </a:r>
             <a:endParaRPr lang="en-US" sz="650" dirty="0"/>
           </a:p>
@@ -2507,7 +2507,7 @@
                   <a:srgbClr val="D97706"/>
                 </a:solidFill>
               </a:rPr>
-              <a:t>Projetado: 474.2h (+77.2h / +19%)</a:t>
+              <a:t>Projetado: 478.2h (+77.2h / +19%)</a:t>
             </a:r>
             <a:endParaRPr lang="en-US" sz="800" dirty="0"/>
           </a:p>
@@ -3537,7 +3537,7 @@
                   <a:srgbClr val="222222"/>
                 </a:solidFill>
               </a:rPr>
-              <a:t>1166h</a:t>
+              <a:t>1170h</a:t>
             </a:r>
             <a:endParaRPr lang="en-US" sz="2400" dirty="0"/>
           </a:p>
@@ -3670,7 +3670,7 @@
                   <a:srgbClr val="D97706"/>
                 </a:solidFill>
               </a:rPr>
-              <a:t>1025h</a:t>
+              <a:t>1029h</a:t>
             </a:r>
             <a:endParaRPr lang="en-US" sz="2400" dirty="0"/>
           </a:p>
@@ -3972,7 +3972,7 @@
                   <a:srgbClr val="888888"/>
                 </a:solidFill>
               </a:rPr>
-              <a:t>projetado: 1349.8h (+16%)</a:t>
+              <a:t>projetado: 1353.8h (+16%)</a:t>
             </a:r>
             <a:endParaRPr lang="en-US" sz="700" dirty="0"/>
           </a:p>
@@ -3987,7 +3987,7 @@
         <p:spPr>
           <a:xfrm>
             <a:off x="2441448" y="2916936"/>
-            <a:ext cx="7325599" cy="54864"/>
+            <a:ext cx="7332457" cy="54864"/>
           </a:xfrm>
           <a:prstGeom prst="rect">
             <a:avLst/>
@@ -4011,8 +4011,8 @@
         </p:nvSpPr>
         <p:spPr>
           <a:xfrm>
-            <a:off x="9767047" y="2916936"/>
-            <a:ext cx="2321321" cy="54864"/>
+            <a:off x="9773905" y="2916936"/>
+            <a:ext cx="2314463" cy="54864"/>
           </a:xfrm>
           <a:prstGeom prst="rect">
             <a:avLst/>
@@ -5070,7 +5070,7 @@
                   <a:srgbClr val="D85A30"/>
                 </a:solidFill>
               </a:rPr>
-              <a:t>20.1%</a:t>
+              <a:t>20.0%</a:t>
             </a:r>
             <a:endParaRPr lang="en-US" sz="2200" dirty="0"/>
           </a:p>
@@ -5203,7 +5203,7 @@
                   <a:srgbClr val="534AB7"/>
                 </a:solidFill>
               </a:rPr>
-              <a:t>8.9%</a:t>
+              <a:t>8.8%</a:t>
             </a:r>
             <a:endParaRPr lang="en-US" sz="2200" dirty="0"/>
           </a:p>
@@ -5336,7 +5336,7 @@
                   <a:srgbClr val="1D9E75"/>
                 </a:solidFill>
               </a:rPr>
-              <a:t>79.9%</a:t>
+              <a:t>80.0%</a:t>
             </a:r>
             <a:endParaRPr lang="en-US" sz="2200" dirty="0"/>
           </a:p>
@@ -6210,7 +6210,7 @@
                   <a:srgbClr val="FFFFFF"/>
                 </a:solidFill>
               </a:rPr>
-              <a:t>84</a:t>
+              <a:t>85</a:t>
             </a:r>
             <a:endParaRPr lang="en-US" sz="650" dirty="0"/>
           </a:p>
@@ -6260,7 +6260,7 @@
                   <a:srgbClr val="222222"/>
                 </a:solidFill>
               </a:rPr>
-              <a:t>84 itens criados pos 01/05</a:t>
+              <a:t>85 itens criados pos 01/05</a:t>
             </a:r>
             <a:endParaRPr lang="en-US" sz="750" dirty="0"/>
           </a:p>
@@ -6296,7 +6296,7 @@
                   <a:srgbClr val="222222"/>
                 </a:solidFill>
               </a:rPr>
-              <a:t>Princ +18h · Redund +133h · Obs +7h</a:t>
+              <a:t>Princ +18h · Redund +137h · Obs +7h</a:t>
             </a:r>
             <a:endParaRPr lang="en-US" sz="750" dirty="0"/>
           </a:p>

--- a/Quadro_Aulas_Report_2026-06-03.pptx
+++ b/Quadro_Aulas_Report_2026-06-03.pptx
@@ -1038,7 +1038,7 @@
                   <a:srgbClr val="8FA3C0"/>
                 </a:solidFill>
               </a:rPr>
-              <a:t>3 de Junho de 2026 as 13:34</a:t>
+              <a:t>3 de Junho de 2026 as 13:41</a:t>
             </a:r>
             <a:endParaRPr lang="en-US" sz="700" dirty="0"/>
           </a:p>

--- a/Quadro_Aulas_Report_2026-06-03.pptx
+++ b/Quadro_Aulas_Report_2026-06-03.pptx
@@ -1038,7 +1038,7 @@
                   <a:srgbClr val="8FA3C0"/>
                 </a:solidFill>
               </a:rPr>
-              <a:t>3 de Junho de 2026 as 13:41</a:t>
+              <a:t>3 de Junho de 2026 as 17:52</a:t>
             </a:r>
             <a:endParaRPr lang="en-US" sz="700" dirty="0"/>
           </a:p>
@@ -1135,7 +1135,7 @@
                   <a:srgbClr val="FFFFFF"/>
                 </a:solidFill>
               </a:rPr>
-              <a:t>348</a:t>
+              <a:t>347</a:t>
             </a:r>
             <a:endParaRPr lang="en-US" sz="2400" dirty="0"/>
           </a:p>
@@ -1207,7 +1207,7 @@
                   <a:srgbClr val="4ADE80"/>
                 </a:solidFill>
               </a:rPr>
-              <a:t>241</a:t>
+              <a:t>242</a:t>
             </a:r>
             <a:endParaRPr lang="en-US" sz="2400" dirty="0"/>
           </a:p>
@@ -1279,7 +1279,7 @@
                   <a:srgbClr val="FCD34D"/>
                 </a:solidFill>
               </a:rPr>
-              <a:t>15</a:t>
+              <a:t>14</a:t>
             </a:r>
             <a:endParaRPr lang="en-US" sz="2400" dirty="0"/>
           </a:p>
@@ -1351,7 +1351,7 @@
                   <a:srgbClr val="F87171"/>
                 </a:solidFill>
               </a:rPr>
-              <a:t>82</a:t>
+              <a:t>81</a:t>
             </a:r>
             <a:endParaRPr lang="en-US" sz="2400" dirty="0"/>
           </a:p>
@@ -1427,7 +1427,7 @@
         <p:spPr>
           <a:xfrm>
             <a:off x="137160" y="3538728"/>
-            <a:ext cx="1419606" cy="91440"/>
+            <a:ext cx="1440180" cy="91440"/>
           </a:xfrm>
           <a:prstGeom prst="rect">
             <a:avLst/>
@@ -1473,7 +1473,7 @@
                   <a:srgbClr val="8FA3C0"/>
                 </a:solidFill>
               </a:rPr>
-              <a:t>69% concluido  .  241 de 348 itens</a:t>
+              <a:t>70% concluido  .  242 de 347 itens</a:t>
             </a:r>
             <a:endParaRPr lang="en-US" sz="700" dirty="0"/>
           </a:p>
@@ -2227,7 +2227,7 @@
                   <a:srgbClr val="222222"/>
                 </a:solidFill>
               </a:rPr>
-              <a:t>8 Stories · 3 NFT · 99 itens</a:t>
+              <a:t>8 Stories · 3 NFT · 98 itens</a:t>
             </a:r>
             <a:endParaRPr lang="en-US" sz="750" dirty="0"/>
           </a:p>
@@ -2263,7 +2263,7 @@
                   <a:srgbClr val="222222"/>
                 </a:solidFill>
               </a:rPr>
-              <a:t>A Fazer: 16 . Em progresso: 4 . Finalizados: 79</a:t>
+              <a:t>A Fazer: 15 . Em progresso: 3 . Finalizados: 80</a:t>
             </a:r>
             <a:endParaRPr lang="en-US" sz="750" dirty="0"/>
           </a:p>
@@ -2299,7 +2299,7 @@
                   <a:srgbClr val="222222"/>
                 </a:solidFill>
               </a:rPr>
-              <a:t>Est: 401h . Real: 435.9h . Rem: 42.3h</a:t>
+              <a:t>Est: 397h . Real: 434.9h . Rem: 30.3h</a:t>
             </a:r>
             <a:endParaRPr lang="en-US" sz="750" dirty="0"/>
           </a:p>
@@ -2425,7 +2425,7 @@
         <p:spPr>
           <a:xfrm>
             <a:off x="4946904" y="1033272"/>
-            <a:ext cx="1762963" cy="50292"/>
+            <a:ext cx="1807037" cy="50292"/>
           </a:xfrm>
           <a:prstGeom prst="rect">
             <a:avLst/>
@@ -2471,7 +2471,7 @@
                   <a:srgbClr val="888888"/>
                 </a:solidFill>
               </a:rPr>
-              <a:t>Subs: 80% · 79 de 99</a:t>
+              <a:t>Subs: 82% · 80 de 98</a:t>
             </a:r>
             <a:endParaRPr lang="en-US" sz="650" dirty="0"/>
           </a:p>
@@ -2507,7 +2507,7 @@
                   <a:srgbClr val="D97706"/>
                 </a:solidFill>
               </a:rPr>
-              <a:t>Projetado: 478.2h (+77.2h / +19%)</a:t>
+              <a:t>Projetado: 465.2h (+68.2h / +17%)</a:t>
             </a:r>
             <a:endParaRPr lang="en-US" sz="800" dirty="0"/>
           </a:p>
@@ -3537,7 +3537,7 @@
                   <a:srgbClr val="222222"/>
                 </a:solidFill>
               </a:rPr>
-              <a:t>1170h</a:t>
+              <a:t>1166h</a:t>
             </a:r>
             <a:endParaRPr lang="en-US" sz="2400" dirty="0"/>
           </a:p>
@@ -3670,7 +3670,7 @@
                   <a:srgbClr val="D97706"/>
                 </a:solidFill>
               </a:rPr>
-              <a:t>1029h</a:t>
+              <a:t>1028h</a:t>
             </a:r>
             <a:endParaRPr lang="en-US" sz="2400" dirty="0"/>
           </a:p>
@@ -3803,7 +3803,7 @@
                   <a:srgbClr val="F87171"/>
                 </a:solidFill>
               </a:rPr>
-              <a:t>324.8h</a:t>
+              <a:t>312.8h</a:t>
             </a:r>
             <a:endParaRPr lang="en-US" sz="2400" dirty="0"/>
           </a:p>
@@ -3936,7 +3936,7 @@
                   <a:srgbClr val="D97706"/>
                 </a:solidFill>
               </a:rPr>
-              <a:t>+183.8h</a:t>
+              <a:t>+174.8h</a:t>
             </a:r>
             <a:endParaRPr lang="en-US" sz="2400" dirty="0"/>
           </a:p>
@@ -3972,7 +3972,7 @@
                   <a:srgbClr val="888888"/>
                 </a:solidFill>
               </a:rPr>
-              <a:t>projetado: 1353.8h (+16%)</a:t>
+              <a:t>projetado: 1340.8h (+15%)</a:t>
             </a:r>
             <a:endParaRPr lang="en-US" sz="700" dirty="0"/>
           </a:p>
@@ -3987,7 +3987,7 @@
         <p:spPr>
           <a:xfrm>
             <a:off x="2441448" y="2916936"/>
-            <a:ext cx="7332457" cy="54864"/>
+            <a:ext cx="7396356" cy="54864"/>
           </a:xfrm>
           <a:prstGeom prst="rect">
             <a:avLst/>
@@ -4011,8 +4011,8 @@
         </p:nvSpPr>
         <p:spPr>
           <a:xfrm>
-            <a:off x="9773905" y="2916936"/>
-            <a:ext cx="2314463" cy="54864"/>
+            <a:off x="9837804" y="2916936"/>
+            <a:ext cx="2250564" cy="54864"/>
           </a:xfrm>
           <a:prstGeom prst="rect">
             <a:avLst/>
@@ -4153,7 +4153,7 @@
                   <a:srgbClr val="0F6E56"/>
                 </a:solidFill>
               </a:rPr>
-              <a:t>88% concluido</a:t>
+              <a:t>89% concluido</a:t>
             </a:r>
             <a:endParaRPr lang="en-US" sz="650" dirty="0"/>
           </a:p>
@@ -4193,7 +4193,7 @@
         <p:spPr>
           <a:xfrm>
             <a:off x="2551176" y="3291840"/>
-            <a:ext cx="4011290" cy="64008"/>
+            <a:ext cx="4056873" cy="64008"/>
           </a:xfrm>
           <a:prstGeom prst="rect">
             <a:avLst/>
@@ -4300,7 +4300,7 @@
                   <a:srgbClr val="1D9E75"/>
                 </a:solidFill>
               </a:rPr>
-              <a:t>05/06/2026</a:t>
+              <a:t>04/06/2026</a:t>
             </a:r>
             <a:endParaRPr lang="en-US" sz="1050" dirty="0"/>
           </a:p>
@@ -5070,7 +5070,7 @@
                   <a:srgbClr val="D85A30"/>
                 </a:solidFill>
               </a:rPr>
-              <a:t>20.0%</a:t>
+              <a:t>20.1%</a:t>
             </a:r>
             <a:endParaRPr lang="en-US" sz="2200" dirty="0"/>
           </a:p>
@@ -5203,7 +5203,7 @@
                   <a:srgbClr val="534AB7"/>
                 </a:solidFill>
               </a:rPr>
-              <a:t>8.8%</a:t>
+              <a:t>8.9%</a:t>
             </a:r>
             <a:endParaRPr lang="en-US" sz="2200" dirty="0"/>
           </a:p>
@@ -5336,7 +5336,7 @@
                   <a:srgbClr val="1D9E75"/>
                 </a:solidFill>
               </a:rPr>
-              <a:t>80.0%</a:t>
+              <a:t>79.9%</a:t>
             </a:r>
             <a:endParaRPr lang="en-US" sz="2200" dirty="0"/>
           </a:p>
@@ -6210,7 +6210,7 @@
                   <a:srgbClr val="FFFFFF"/>
                 </a:solidFill>
               </a:rPr>
-              <a:t>85</a:t>
+              <a:t>84</a:t>
             </a:r>
             <a:endParaRPr lang="en-US" sz="650" dirty="0"/>
           </a:p>
@@ -6260,7 +6260,7 @@
                   <a:srgbClr val="222222"/>
                 </a:solidFill>
               </a:rPr>
-              <a:t>85 itens criados pos 01/05</a:t>
+              <a:t>84 itens criados pos 01/05</a:t>
             </a:r>
             <a:endParaRPr lang="en-US" sz="750" dirty="0"/>
           </a:p>
@@ -6296,7 +6296,7 @@
                   <a:srgbClr val="222222"/>
                 </a:solidFill>
               </a:rPr>
-              <a:t>Princ +18h · Redund +137h · Obs +7h</a:t>
+              <a:t>Princ +18h · Redund +133h · Obs +7h</a:t>
             </a:r>
             <a:endParaRPr lang="en-US" sz="750" dirty="0"/>
           </a:p>
@@ -6952,7 +6952,7 @@
                   <a:srgbClr val="D97706"/>
                 </a:solidFill>
               </a:rPr>
-              <a:t>237.7h · 28 subs finalizadas</a:t>
+              <a:t>237.7h · 29 subs finalizadas</a:t>
             </a:r>
             <a:endParaRPr lang="en-US" sz="950" dirty="0"/>
           </a:p>
